--- a/Documentation/Presentations/Presentation-2.pptx
+++ b/Documentation/Presentations/Presentation-2.pptx
@@ -4437,7 +4437,7 @@
               <a:buNone/>
             </a:pPr>
             <a:r>
-              <a:rPr lang="en-US" sz="2200" b="1">
+              <a:rPr lang="en-US" sz="2200" b="1" dirty="0">
                 <a:solidFill>
                   <a:srgbClr val="EAEAEA"/>
                 </a:solidFill>
@@ -4445,7 +4445,7 @@
                 <a:ea typeface="Calibri" pitchFamily="34" charset="-122"/>
                 <a:cs typeface="Calibri" pitchFamily="34" charset="-120"/>
               </a:rPr>
-              <a:t>CONTEXT POINTS</a:t>
+              <a:t>CONTEXT POINTS: VORONOI AND PERLIN NOISE</a:t>
             </a:r>
             <a:endParaRPr lang="en-US" sz="2200" dirty="0"/>
           </a:p>
@@ -4453,10 +4453,10 @@
       </p:sp>
       <p:sp>
         <p:nvSpPr>
-          <p:cNvPr id="5" name="Shape 3">
+          <p:cNvPr id="29" name="Text 27">
             <a:extLst>
               <a:ext uri="{FF2B5EF4-FFF2-40B4-BE49-F238E27FC236}">
-                <a16:creationId xmlns:a16="http://schemas.microsoft.com/office/drawing/2014/main" id="{C330680D-FC8E-7CB9-3D57-1B487570955D}"/>
+                <a16:creationId xmlns:a16="http://schemas.microsoft.com/office/drawing/2014/main" id="{06A1D6AC-D69E-B07B-4F3D-62A81C12130E}"/>
               </a:ext>
             </a:extLst>
           </p:cNvPr>
@@ -4465,8 +4465,42 @@
         </p:nvSpPr>
         <p:spPr>
           <a:xfrm>
-            <a:off x="228600" y="914400"/>
-            <a:ext cx="2743200" cy="1737360"/>
+            <a:off x="0" y="4754880"/>
+            <a:ext cx="9144000" cy="365760"/>
+          </a:xfrm>
+          <a:prstGeom prst="rect">
+            <a:avLst/>
+          </a:prstGeom>
+          <a:noFill/>
+          <a:ln/>
+        </p:spPr>
+        <p:txBody>
+          <a:bodyPr wrap="square" lIns="0" tIns="0" rIns="0" bIns="0" rtlCol="0" anchor="ctr"/>
+          <a:lstStyle/>
+          <a:p>
+            <a:pPr marL="0" indent="0" algn="ctr">
+              <a:buNone/>
+            </a:pPr>
+            <a:endParaRPr lang="en-US" sz="1200" dirty="0"/>
+          </a:p>
+        </p:txBody>
+      </p:sp>
+      <p:sp>
+        <p:nvSpPr>
+          <p:cNvPr id="30" name="VoronoiCard">
+            <a:extLst>
+              <a:ext uri="{FF2B5EF4-FFF2-40B4-BE49-F238E27FC236}">
+                <a16:creationId xmlns:a16="http://schemas.microsoft.com/office/drawing/2014/main" id="{0D020DD7-6C2D-0B7E-AB29-1799DDB8A2ED}"/>
+              </a:ext>
+            </a:extLst>
+          </p:cNvPr>
+          <p:cNvSpPr/>
+          <p:nvPr/>
+        </p:nvSpPr>
+        <p:spPr>
+          <a:xfrm>
+            <a:off x="228600" y="800000"/>
+            <a:ext cx="4160000" cy="4120000"/>
           </a:xfrm>
           <a:prstGeom prst="rect">
             <a:avLst/>
@@ -4498,10 +4532,10 @@
       </p:sp>
       <p:sp>
         <p:nvSpPr>
-          <p:cNvPr id="6" name="Shape 4">
+          <p:cNvPr id="31" name="VoronoiAccent">
             <a:extLst>
               <a:ext uri="{FF2B5EF4-FFF2-40B4-BE49-F238E27FC236}">
-                <a16:creationId xmlns:a16="http://schemas.microsoft.com/office/drawing/2014/main" id="{B8175391-9263-8D27-F2F2-B1024768AE2F}"/>
+                <a16:creationId xmlns:a16="http://schemas.microsoft.com/office/drawing/2014/main" id="{6E34F07C-A895-C066-7A6A-794746EDAE32}"/>
               </a:ext>
             </a:extLst>
           </p:cNvPr>
@@ -4510,18 +4544,18 @@
         </p:nvSpPr>
         <p:spPr>
           <a:xfrm>
-            <a:off x="222069" y="914400"/>
-            <a:ext cx="82296" cy="1737360"/>
-          </a:xfrm>
-          <a:prstGeom prst="rect">
-            <a:avLst/>
-          </a:prstGeom>
-          <a:solidFill>
-            <a:srgbClr val="2ECC71"/>
+            <a:off x="222069" y="800000"/>
+            <a:ext cx="82296" cy="4120000"/>
+          </a:xfrm>
+          <a:prstGeom prst="rect">
+            <a:avLst/>
+          </a:prstGeom>
+          <a:solidFill>
+            <a:srgbClr val="4ECDC4"/>
           </a:solidFill>
           <a:ln w="12700">
             <a:solidFill>
-              <a:srgbClr val="2ECC71"/>
+              <a:srgbClr val="4ECDC4"/>
             </a:solidFill>
             <a:prstDash val="solid"/>
           </a:ln>
@@ -4536,10 +4570,10 @@
       </p:sp>
       <p:sp>
         <p:nvSpPr>
-          <p:cNvPr id="7" name="Text 5">
+          <p:cNvPr id="32" name="VoronoiTitle">
             <a:extLst>
               <a:ext uri="{FF2B5EF4-FFF2-40B4-BE49-F238E27FC236}">
-                <a16:creationId xmlns:a16="http://schemas.microsoft.com/office/drawing/2014/main" id="{16B62F40-0306-9753-B57B-4603AF8C86AF}"/>
+                <a16:creationId xmlns:a16="http://schemas.microsoft.com/office/drawing/2014/main" id="{FA4D3882-6D69-B226-D0C5-CBF3EE330417}"/>
               </a:ext>
             </a:extLst>
           </p:cNvPr>
@@ -4548,47 +4582,40 @@
         </p:nvSpPr>
         <p:spPr>
           <a:xfrm>
-            <a:off x="365760" y="987552"/>
-            <a:ext cx="2514600" cy="411480"/>
-          </a:xfrm>
-          <a:prstGeom prst="rect">
-            <a:avLst/>
-          </a:prstGeom>
-          <a:noFill/>
-          <a:ln/>
-        </p:spPr>
-        <p:txBody>
-          <a:bodyPr wrap="square" lIns="0" tIns="0" rIns="0" bIns="0" rtlCol="0" anchor="ctr"/>
+            <a:off x="370000" y="840000"/>
+            <a:ext cx="3900000" cy="380000"/>
+          </a:xfrm>
+          <a:prstGeom prst="rect">
+            <a:avLst/>
+          </a:prstGeom>
+          <a:noFill/>
+          <a:ln/>
+        </p:spPr>
+        <p:txBody>
+          <a:bodyPr wrap="square" lIns="91440" tIns="45720" rIns="91440" bIns="45720" rtlCol="0" anchor="ctr"/>
           <a:lstStyle/>
           <a:p>
             <a:pPr marL="0" indent="0">
               <a:buNone/>
             </a:pPr>
             <a:r>
-              <a:rPr lang="en-US" sz="1300" b="1" dirty="0">
-                <a:solidFill>
-                  <a:schemeClr val="bg1"/>
-                </a:solidFill>
-                <a:latin typeface="Calibri" pitchFamily="34" charset="0"/>
-                <a:ea typeface="Calibri" pitchFamily="34" charset="-122"/>
-                <a:cs typeface="Calibri" pitchFamily="34" charset="-120"/>
-              </a:rPr>
-              <a:t>Game Loop &amp; State Machine</a:t>
-            </a:r>
-            <a:endParaRPr lang="en-US" sz="1300" dirty="0">
-              <a:solidFill>
-                <a:schemeClr val="bg1"/>
-              </a:solidFill>
-            </a:endParaRPr>
-          </a:p>
-        </p:txBody>
-      </p:sp>
-      <p:sp>
-        <p:nvSpPr>
-          <p:cNvPr id="8" name="Text 6">
+              <a:rPr lang="en-US" sz="1400" b="1">
+                <a:solidFill>
+                  <a:srgbClr val="EAEAEA"/>
+                </a:solidFill>
+                <a:latin typeface="Calibri" pitchFamily="34" charset="0"/>
+              </a:rPr>
+              <a:t>Voronoi Regionalization</a:t>
+            </a:r>
+          </a:p>
+        </p:txBody>
+      </p:sp>
+      <p:sp>
+        <p:nvSpPr>
+          <p:cNvPr id="34" name="VoronoiDesc">
             <a:extLst>
               <a:ext uri="{FF2B5EF4-FFF2-40B4-BE49-F238E27FC236}">
-                <a16:creationId xmlns:a16="http://schemas.microsoft.com/office/drawing/2014/main" id="{06AD1446-67B6-10C9-8A2B-449535F25091}"/>
+                <a16:creationId xmlns:a16="http://schemas.microsoft.com/office/drawing/2014/main" id="{B2B3F476-CE9A-F813-B2F7-2880D3525053}"/>
               </a:ext>
             </a:extLst>
           </p:cNvPr>
@@ -4597,47 +4624,83 @@
         </p:nvSpPr>
         <p:spPr>
           <a:xfrm>
-            <a:off x="365760" y="1417320"/>
-            <a:ext cx="2514600" cy="1143000"/>
-          </a:xfrm>
-          <a:prstGeom prst="rect">
-            <a:avLst/>
-          </a:prstGeom>
-          <a:noFill/>
-          <a:ln/>
-        </p:spPr>
-        <p:txBody>
-          <a:bodyPr wrap="square" lIns="0" tIns="0" rIns="0" bIns="0" rtlCol="0" anchor="ctr"/>
+            <a:off x="370000" y="3365024"/>
+            <a:ext cx="3900000" cy="1434976"/>
+          </a:xfrm>
+          <a:prstGeom prst="rect">
+            <a:avLst/>
+          </a:prstGeom>
+          <a:noFill/>
+          <a:ln/>
+        </p:spPr>
+        <p:txBody>
+          <a:bodyPr wrap="square" lIns="91440" tIns="45720" rIns="91440" bIns="45720" rtlCol="0" anchor="t"/>
           <a:lstStyle/>
           <a:p>
             <a:pPr marL="0" indent="0">
               <a:buNone/>
             </a:pPr>
             <a:r>
-              <a:rPr lang="en-US" sz="1050" dirty="0">
-                <a:solidFill>
-                  <a:schemeClr val="bg1"/>
-                </a:solidFill>
-                <a:latin typeface="Calibri" pitchFamily="34" charset="0"/>
-                <a:ea typeface="Calibri" pitchFamily="34" charset="-122"/>
-                <a:cs typeface="Calibri" pitchFamily="34" charset="-120"/>
-              </a:rPr>
-              <a:t>Fixed 60 FPS timestep, push/pop state transitions (Menu, Playing, Paused, Settings)</a:t>
-            </a:r>
-            <a:endParaRPr lang="en-US" sz="1050" dirty="0">
-              <a:solidFill>
-                <a:schemeClr val="bg1"/>
-              </a:solidFill>
-            </a:endParaRPr>
-          </a:p>
-        </p:txBody>
-      </p:sp>
-      <p:sp>
-        <p:nvSpPr>
-          <p:cNvPr id="9" name="Shape 7">
+              <a:rPr lang="en-US" sz="1000" b="1" dirty="0">
+                <a:solidFill>
+                  <a:srgbClr val="4ECDC4"/>
+                </a:solidFill>
+                <a:latin typeface="Calibri" pitchFamily="34" charset="0"/>
+              </a:rPr>
+              <a:t>What is it?</a:t>
+            </a:r>
+          </a:p>
+          <a:p>
+            <a:pPr marL="0" indent="0">
+              <a:buNone/>
+            </a:pPr>
+            <a:r>
+              <a:rPr lang="en-US" sz="950" dirty="0">
+                <a:solidFill>
+                  <a:srgbClr val="C8D8E8"/>
+                </a:solidFill>
+                <a:latin typeface="Calibri" pitchFamily="34" charset="0"/>
+              </a:rPr>
+              <a:t>Imagine dropping seeds onto the map. Every tile simply asks, “which seed am I closest to?” That seed claims the tile. Regions separated into different areas.</a:t>
+            </a:r>
+            <a:endParaRPr lang="en-US" sz="950" dirty="0"/>
+          </a:p>
+          <a:p>
+            <a:pPr marL="0" indent="0">
+              <a:buNone/>
+            </a:pPr>
+            <a:r>
+              <a:rPr lang="en-US" sz="950" b="1" dirty="0">
+                <a:solidFill>
+                  <a:srgbClr val="4ECDC4"/>
+                </a:solidFill>
+                <a:latin typeface="Calibri" pitchFamily="34" charset="0"/>
+              </a:rPr>
+              <a:t>In THORNS: </a:t>
+            </a:r>
+          </a:p>
+          <a:p>
+            <a:pPr marL="0" indent="0">
+              <a:buNone/>
+            </a:pPr>
+            <a:r>
+              <a:rPr lang="en-US" sz="950" dirty="0">
+                <a:solidFill>
+                  <a:srgbClr val="C8D8E8"/>
+                </a:solidFill>
+                <a:latin typeface="Calibri" pitchFamily="34" charset="0"/>
+              </a:rPr>
+              <a:t>Each seed is a map site. POIs like farms and villages are placed at those sites, so they are always spaced out and never clump together.</a:t>
+            </a:r>
+          </a:p>
+        </p:txBody>
+      </p:sp>
+      <p:sp>
+        <p:nvSpPr>
+          <p:cNvPr id="35" name="PerlinCard">
             <a:extLst>
               <a:ext uri="{FF2B5EF4-FFF2-40B4-BE49-F238E27FC236}">
-                <a16:creationId xmlns:a16="http://schemas.microsoft.com/office/drawing/2014/main" id="{8FBADC45-25AB-7725-6D0B-275037B37981}"/>
+                <a16:creationId xmlns:a16="http://schemas.microsoft.com/office/drawing/2014/main" id="{2E01814E-9691-AF8D-F2B0-1B90789C9F6C}"/>
               </a:ext>
             </a:extLst>
           </p:cNvPr>
@@ -4646,8 +4709,8 @@
         </p:nvSpPr>
         <p:spPr>
           <a:xfrm>
-            <a:off x="3200400" y="914400"/>
-            <a:ext cx="2743200" cy="1737360"/>
+            <a:off x="4755600" y="800000"/>
+            <a:ext cx="4160000" cy="4120000"/>
           </a:xfrm>
           <a:prstGeom prst="rect">
             <a:avLst/>
@@ -4679,10 +4742,10 @@
       </p:sp>
       <p:sp>
         <p:nvSpPr>
-          <p:cNvPr id="10" name="Shape 8">
+          <p:cNvPr id="36" name="PerlinAccent">
             <a:extLst>
               <a:ext uri="{FF2B5EF4-FFF2-40B4-BE49-F238E27FC236}">
-                <a16:creationId xmlns:a16="http://schemas.microsoft.com/office/drawing/2014/main" id="{2FAD4643-3257-8C93-328A-119D987F5DCC}"/>
+                <a16:creationId xmlns:a16="http://schemas.microsoft.com/office/drawing/2014/main" id="{4B870E8D-E67A-12DF-CEEB-0CD33F989463}"/>
               </a:ext>
             </a:extLst>
           </p:cNvPr>
@@ -4691,150 +4754,14 @@
         </p:nvSpPr>
         <p:spPr>
           <a:xfrm>
-            <a:off x="3200400" y="914400"/>
-            <a:ext cx="82296" cy="1737360"/>
-          </a:xfrm>
-          <a:prstGeom prst="rect">
-            <a:avLst/>
-          </a:prstGeom>
-          <a:solidFill>
-            <a:srgbClr val="2ECC71"/>
-          </a:solidFill>
-          <a:ln w="12700">
-            <a:solidFill>
-              <a:srgbClr val="2ECC71"/>
-            </a:solidFill>
-            <a:prstDash val="solid"/>
-          </a:ln>
-        </p:spPr>
-        <p:txBody>
-          <a:bodyPr/>
-          <a:lstStyle/>
-          <a:p>
-            <a:endParaRPr lang="en-GB"/>
-          </a:p>
-        </p:txBody>
-      </p:sp>
-      <p:sp>
-        <p:nvSpPr>
-          <p:cNvPr id="11" name="Text 9">
-            <a:extLst>
-              <a:ext uri="{FF2B5EF4-FFF2-40B4-BE49-F238E27FC236}">
-                <a16:creationId xmlns:a16="http://schemas.microsoft.com/office/drawing/2014/main" id="{19F1BF51-DD6D-51A4-CDA5-1AD32CFF2815}"/>
-              </a:ext>
-            </a:extLst>
-          </p:cNvPr>
-          <p:cNvSpPr/>
-          <p:nvPr/>
-        </p:nvSpPr>
-        <p:spPr>
-          <a:xfrm>
-            <a:off x="3337560" y="987552"/>
-            <a:ext cx="2514600" cy="411480"/>
-          </a:xfrm>
-          <a:prstGeom prst="rect">
-            <a:avLst/>
-          </a:prstGeom>
-          <a:noFill/>
-          <a:ln/>
-        </p:spPr>
-        <p:txBody>
-          <a:bodyPr wrap="square" lIns="0" tIns="0" rIns="0" bIns="0" rtlCol="0" anchor="ctr"/>
-          <a:lstStyle/>
-          <a:p>
-            <a:pPr marL="0" indent="0">
-              <a:buNone/>
-            </a:pPr>
-            <a:r>
-              <a:rPr lang="en-US" sz="1300" b="1" dirty="0">
-                <a:solidFill>
-                  <a:schemeClr val="bg1"/>
-                </a:solidFill>
-                <a:latin typeface="Calibri" pitchFamily="34" charset="0"/>
-                <a:ea typeface="Calibri" pitchFamily="34" charset="-122"/>
-                <a:cs typeface="Calibri" pitchFamily="34" charset="-120"/>
-              </a:rPr>
-              <a:t>Input Abstraction Layer</a:t>
-            </a:r>
-            <a:endParaRPr lang="en-US" sz="1300" dirty="0">
-              <a:solidFill>
-                <a:schemeClr val="bg1"/>
-              </a:solidFill>
-            </a:endParaRPr>
-          </a:p>
-        </p:txBody>
-      </p:sp>
-      <p:sp>
-        <p:nvSpPr>
-          <p:cNvPr id="12" name="Text 10">
-            <a:extLst>
-              <a:ext uri="{FF2B5EF4-FFF2-40B4-BE49-F238E27FC236}">
-                <a16:creationId xmlns:a16="http://schemas.microsoft.com/office/drawing/2014/main" id="{EFC9C69F-7353-7335-B3C1-9165A762BEF0}"/>
-              </a:ext>
-            </a:extLst>
-          </p:cNvPr>
-          <p:cNvSpPr/>
-          <p:nvPr/>
-        </p:nvSpPr>
-        <p:spPr>
-          <a:xfrm>
-            <a:off x="3337560" y="1417320"/>
-            <a:ext cx="2514600" cy="1143000"/>
-          </a:xfrm>
-          <a:prstGeom prst="rect">
-            <a:avLst/>
-          </a:prstGeom>
-          <a:noFill/>
-          <a:ln/>
-        </p:spPr>
-        <p:txBody>
-          <a:bodyPr wrap="square" lIns="0" tIns="0" rIns="0" bIns="0" rtlCol="0" anchor="ctr"/>
-          <a:lstStyle/>
-          <a:p>
-            <a:pPr marL="0" indent="0">
-              <a:buNone/>
-            </a:pPr>
-            <a:r>
-              <a:rPr lang="en-US" sz="1050" dirty="0">
-                <a:solidFill>
-                  <a:schemeClr val="bg1"/>
-                </a:solidFill>
-                <a:latin typeface="Calibri" pitchFamily="34" charset="0"/>
-                <a:ea typeface="Calibri" pitchFamily="34" charset="-122"/>
-                <a:cs typeface="Calibri" pitchFamily="34" charset="-120"/>
-              </a:rPr>
-              <a:t>Keyboard + gamepad support, rebindable keys, device detection at runtime</a:t>
-            </a:r>
-            <a:endParaRPr lang="en-US" sz="1050" dirty="0">
-              <a:solidFill>
-                <a:schemeClr val="bg1"/>
-              </a:solidFill>
-            </a:endParaRPr>
-          </a:p>
-        </p:txBody>
-      </p:sp>
-      <p:sp>
-        <p:nvSpPr>
-          <p:cNvPr id="13" name="Shape 11">
-            <a:extLst>
-              <a:ext uri="{FF2B5EF4-FFF2-40B4-BE49-F238E27FC236}">
-                <a16:creationId xmlns:a16="http://schemas.microsoft.com/office/drawing/2014/main" id="{90A7096D-9919-7BC2-9D3B-9EBEE82EBE5A}"/>
-              </a:ext>
-            </a:extLst>
-          </p:cNvPr>
-          <p:cNvSpPr/>
-          <p:nvPr/>
-        </p:nvSpPr>
-        <p:spPr>
-          <a:xfrm>
-            <a:off x="6172200" y="914400"/>
-            <a:ext cx="2743200" cy="1737360"/>
-          </a:xfrm>
-          <a:prstGeom prst="rect">
-            <a:avLst/>
-          </a:prstGeom>
-          <a:solidFill>
-            <a:srgbClr val="1A2744"/>
+            <a:off x="4749069" y="800000"/>
+            <a:ext cx="82296" cy="4120000"/>
+          </a:xfrm>
+          <a:prstGeom prst="rect">
+            <a:avLst/>
+          </a:prstGeom>
+          <a:solidFill>
+            <a:srgbClr val="4ECDC4"/>
           </a:solidFill>
           <a:ln w="12700">
             <a:solidFill>
@@ -4842,28 +4769,21 @@
             </a:solidFill>
             <a:prstDash val="solid"/>
           </a:ln>
-          <a:effectLst>
-            <a:outerShdw blurRad="76200" dist="25400" dir="8100000" algn="bl" rotWithShape="0">
-              <a:srgbClr val="000000">
-                <a:alpha val="25000"/>
-              </a:srgbClr>
-            </a:outerShdw>
-          </a:effectLst>
-        </p:spPr>
-        <p:txBody>
-          <a:bodyPr/>
-          <a:lstStyle/>
-          <a:p>
-            <a:endParaRPr lang="en-GB" dirty="0"/>
-          </a:p>
-        </p:txBody>
-      </p:sp>
-      <p:sp>
-        <p:nvSpPr>
-          <p:cNvPr id="14" name="Shape 12">
+        </p:spPr>
+        <p:txBody>
+          <a:bodyPr/>
+          <a:lstStyle/>
+          <a:p>
+            <a:endParaRPr lang="en-GB"/>
+          </a:p>
+        </p:txBody>
+      </p:sp>
+      <p:sp>
+        <p:nvSpPr>
+          <p:cNvPr id="37" name="PerlinTitle">
             <a:extLst>
               <a:ext uri="{FF2B5EF4-FFF2-40B4-BE49-F238E27FC236}">
-                <a16:creationId xmlns:a16="http://schemas.microsoft.com/office/drawing/2014/main" id="{EDF742F2-89A9-0D84-FC0D-8B4D01D4AFE4}"/>
+                <a16:creationId xmlns:a16="http://schemas.microsoft.com/office/drawing/2014/main" id="{953C4C46-4BAB-76D1-28BE-69478E04EC0F}"/>
               </a:ext>
             </a:extLst>
           </p:cNvPr>
@@ -4872,36 +4792,40 @@
         </p:nvSpPr>
         <p:spPr>
           <a:xfrm>
-            <a:off x="6172200" y="914400"/>
-            <a:ext cx="82296" cy="1737360"/>
-          </a:xfrm>
-          <a:prstGeom prst="rect">
-            <a:avLst/>
-          </a:prstGeom>
-          <a:solidFill>
-            <a:srgbClr val="2ECC71"/>
-          </a:solidFill>
-          <a:ln w="12700">
-            <a:solidFill>
-              <a:srgbClr val="2ECC71"/>
-            </a:solidFill>
-            <a:prstDash val="solid"/>
-          </a:ln>
-        </p:spPr>
-        <p:txBody>
-          <a:bodyPr/>
-          <a:lstStyle/>
-          <a:p>
-            <a:endParaRPr lang="en-GB"/>
-          </a:p>
-        </p:txBody>
-      </p:sp>
-      <p:sp>
-        <p:nvSpPr>
-          <p:cNvPr id="15" name="Text 13">
+            <a:off x="4885600" y="763118"/>
+            <a:ext cx="3900000" cy="380000"/>
+          </a:xfrm>
+          <a:prstGeom prst="rect">
+            <a:avLst/>
+          </a:prstGeom>
+          <a:noFill/>
+          <a:ln/>
+        </p:spPr>
+        <p:txBody>
+          <a:bodyPr wrap="square" lIns="91440" tIns="45720" rIns="91440" bIns="45720" rtlCol="0" anchor="ctr"/>
+          <a:lstStyle/>
+          <a:p>
+            <a:pPr marL="0" indent="0">
+              <a:buNone/>
+            </a:pPr>
+            <a:r>
+              <a:rPr lang="en-US" sz="1400" b="1" dirty="0">
+                <a:solidFill>
+                  <a:srgbClr val="EAEAEA"/>
+                </a:solidFill>
+                <a:latin typeface="Calibri" pitchFamily="34" charset="0"/>
+              </a:rPr>
+              <a:t>Perlin Noise</a:t>
+            </a:r>
+          </a:p>
+        </p:txBody>
+      </p:sp>
+      <p:sp>
+        <p:nvSpPr>
+          <p:cNvPr id="39" name="PerlinDesc">
             <a:extLst>
               <a:ext uri="{FF2B5EF4-FFF2-40B4-BE49-F238E27FC236}">
-                <a16:creationId xmlns:a16="http://schemas.microsoft.com/office/drawing/2014/main" id="{36293650-8652-28FE-A3BD-DA1D4122B7A1}"/>
+                <a16:creationId xmlns:a16="http://schemas.microsoft.com/office/drawing/2014/main" id="{03F72AC2-581F-BE1B-AC8C-B2A86403AB18}"/>
               </a:ext>
             </a:extLst>
           </p:cNvPr>
@@ -4910,659 +4834,171 @@
         </p:nvSpPr>
         <p:spPr>
           <a:xfrm>
-            <a:off x="6309360" y="987552"/>
-            <a:ext cx="2514600" cy="411480"/>
-          </a:xfrm>
-          <a:prstGeom prst="rect">
-            <a:avLst/>
-          </a:prstGeom>
-          <a:noFill/>
-          <a:ln/>
-        </p:spPr>
-        <p:txBody>
-          <a:bodyPr wrap="square" lIns="0" tIns="0" rIns="0" bIns="0" rtlCol="0" anchor="ctr"/>
+            <a:off x="4923482" y="3527305"/>
+            <a:ext cx="3900000" cy="1820000"/>
+          </a:xfrm>
+          <a:prstGeom prst="rect">
+            <a:avLst/>
+          </a:prstGeom>
+          <a:noFill/>
+          <a:ln/>
+        </p:spPr>
+        <p:txBody>
+          <a:bodyPr wrap="square" lIns="91440" tIns="45720" rIns="91440" bIns="45720" rtlCol="0" anchor="t"/>
           <a:lstStyle/>
           <a:p>
             <a:pPr marL="0" indent="0">
               <a:buNone/>
             </a:pPr>
             <a:r>
-              <a:rPr lang="en-US" sz="1300" b="1" dirty="0">
-                <a:solidFill>
-                  <a:schemeClr val="bg1"/>
-                </a:solidFill>
-                <a:latin typeface="Calibri" pitchFamily="34" charset="0"/>
-                <a:ea typeface="Calibri" pitchFamily="34" charset="-122"/>
-                <a:cs typeface="Calibri" pitchFamily="34" charset="-120"/>
-              </a:rPr>
-              <a:t>Procedural Map Generation</a:t>
-            </a:r>
-            <a:endParaRPr lang="en-US" sz="1300" dirty="0">
-              <a:solidFill>
-                <a:schemeClr val="bg1"/>
-              </a:solidFill>
-            </a:endParaRPr>
-          </a:p>
-        </p:txBody>
-      </p:sp>
-      <p:sp>
-        <p:nvSpPr>
-          <p:cNvPr id="16" name="Text 14">
+              <a:rPr lang="en-US" sz="1000" b="1" dirty="0">
+                <a:solidFill>
+                  <a:srgbClr val="4ECDC4"/>
+                </a:solidFill>
+                <a:latin typeface="Calibri" pitchFamily="34" charset="0"/>
+              </a:rPr>
+              <a:t>What is it?</a:t>
+            </a:r>
+          </a:p>
+          <a:p>
+            <a:pPr marL="0" indent="0">
+              <a:buNone/>
+            </a:pPr>
+            <a:r>
+              <a:rPr lang="en-US" sz="950" dirty="0">
+                <a:solidFill>
+                  <a:srgbClr val="C8D8E8"/>
+                </a:solidFill>
+                <a:latin typeface="Calibri" pitchFamily="34" charset="0"/>
+              </a:rPr>
+              <a:t>Pure random noise looks like TV static. Perlin Noise is randomness that flows smoothly, like rolling hills or drifting clouds. Each value blends gently into the next. (Octaves are used to perform multiple layers of noise)</a:t>
+            </a:r>
+          </a:p>
+          <a:p>
+            <a:pPr marL="0" indent="0">
+              <a:buNone/>
+            </a:pPr>
+            <a:endParaRPr lang="en-US" sz="950" dirty="0"/>
+          </a:p>
+          <a:p>
+            <a:pPr marL="0" indent="0">
+              <a:buNone/>
+            </a:pPr>
+            <a:r>
+              <a:rPr lang="en-US" sz="950" b="1" dirty="0">
+                <a:solidFill>
+                  <a:srgbClr val="4ECDC4"/>
+                </a:solidFill>
+                <a:latin typeface="Calibri" pitchFamily="34" charset="0"/>
+              </a:rPr>
+              <a:t>In THORNS: </a:t>
+            </a:r>
+            <a:r>
+              <a:rPr lang="en-US" sz="950" dirty="0">
+                <a:solidFill>
+                  <a:srgbClr val="C8D8E8"/>
+                </a:solidFill>
+                <a:latin typeface="Calibri" pitchFamily="34" charset="0"/>
+              </a:rPr>
+              <a:t>Used to scatter world objects (rocks, roots, stumps) across the terrain in natural-looking clusters, rather than totally random or evenly spaced patterns.</a:t>
+            </a:r>
+          </a:p>
+        </p:txBody>
+      </p:sp>
+      <p:pic>
+        <p:nvPicPr>
+          <p:cNvPr id="1026" name="Picture 2" descr="How To Create Perlin Noise – Perlin Noise Tutorial – BVJH">
             <a:extLst>
               <a:ext uri="{FF2B5EF4-FFF2-40B4-BE49-F238E27FC236}">
-                <a16:creationId xmlns:a16="http://schemas.microsoft.com/office/drawing/2014/main" id="{20FC415E-D813-9E05-7F76-E7105C35F9C2}"/>
+                <a16:creationId xmlns:a16="http://schemas.microsoft.com/office/drawing/2014/main" id="{D19D0595-2C7B-3306-E39D-62806C7F27F3}"/>
               </a:ext>
             </a:extLst>
           </p:cNvPr>
-          <p:cNvSpPr/>
-          <p:nvPr/>
-        </p:nvSpPr>
-        <p:spPr>
-          <a:xfrm>
-            <a:off x="6309360" y="1417320"/>
-            <a:ext cx="2514600" cy="1143000"/>
-          </a:xfrm>
-          <a:prstGeom prst="rect">
-            <a:avLst/>
-          </a:prstGeom>
-          <a:noFill/>
-          <a:ln/>
-        </p:spPr>
-        <p:txBody>
-          <a:bodyPr wrap="square" lIns="0" tIns="0" rIns="0" bIns="0" rtlCol="0" anchor="ctr"/>
-          <a:lstStyle/>
-          <a:p>
-            <a:pPr marL="0" indent="0">
-              <a:buNone/>
-            </a:pPr>
-            <a:r>
-              <a:rPr lang="en-US" sz="1050" dirty="0">
-                <a:solidFill>
-                  <a:schemeClr val="bg1"/>
-                </a:solidFill>
-                <a:latin typeface="Calibri" pitchFamily="34" charset="0"/>
-                <a:ea typeface="Calibri" pitchFamily="34" charset="-122"/>
-                <a:cs typeface="Calibri" pitchFamily="34" charset="-120"/>
-              </a:rPr>
-              <a:t>Voronoi regionalization via Poisson disk sampling, spatial grid O(k) lookups</a:t>
-            </a:r>
-            <a:endParaRPr lang="en-US" sz="1050" dirty="0">
-              <a:solidFill>
-                <a:schemeClr val="bg1"/>
-              </a:solidFill>
-            </a:endParaRPr>
-          </a:p>
-        </p:txBody>
-      </p:sp>
-      <p:sp>
-        <p:nvSpPr>
-          <p:cNvPr id="17" name="Shape 15">
+          <p:cNvPicPr>
+            <a:picLocks noChangeAspect="1" noChangeArrowheads="1"/>
+          </p:cNvPicPr>
+          <p:nvPr/>
+        </p:nvPicPr>
+        <p:blipFill>
+          <a:blip r:embed="rId3">
+            <a:extLst>
+              <a:ext uri="{28A0092B-C50C-407E-A947-70E740481C1C}">
+                <a14:useLocalDpi xmlns:a14="http://schemas.microsoft.com/office/drawing/2010/main" val="0"/>
+              </a:ext>
+            </a:extLst>
+          </a:blip>
+          <a:srcRect/>
+          <a:stretch>
+            <a:fillRect/>
+          </a:stretch>
+        </p:blipFill>
+        <p:spPr bwMode="auto">
+          <a:xfrm>
+            <a:off x="5946937" y="1030000"/>
+            <a:ext cx="2915698" cy="2653854"/>
+          </a:xfrm>
+          <a:prstGeom prst="rect">
+            <a:avLst/>
+          </a:prstGeom>
+          <a:noFill/>
+          <a:extLst>
+            <a:ext uri="{909E8E84-426E-40DD-AFC4-6F175D3DCCD1}">
+              <a14:hiddenFill xmlns:a14="http://schemas.microsoft.com/office/drawing/2010/main">
+                <a:solidFill>
+                  <a:srgbClr val="FFFFFF"/>
+                </a:solidFill>
+              </a14:hiddenFill>
+            </a:ext>
+          </a:extLst>
+        </p:spPr>
+      </p:pic>
+      <p:pic>
+        <p:nvPicPr>
+          <p:cNvPr id="1028" name="Picture 4" descr="Voronoi diagram. As given in Fig. 2, a Voronoi polygon contains the... |  Download Scientific Diagram">
             <a:extLst>
               <a:ext uri="{FF2B5EF4-FFF2-40B4-BE49-F238E27FC236}">
-                <a16:creationId xmlns:a16="http://schemas.microsoft.com/office/drawing/2014/main" id="{018E97A8-145C-A9D9-705A-30D4A5104FD8}"/>
+                <a16:creationId xmlns:a16="http://schemas.microsoft.com/office/drawing/2014/main" id="{62AF8775-880E-89BE-5158-8C50788FEC49}"/>
               </a:ext>
             </a:extLst>
           </p:cNvPr>
-          <p:cNvSpPr/>
-          <p:nvPr/>
-        </p:nvSpPr>
-        <p:spPr>
-          <a:xfrm>
-            <a:off x="228600" y="2834640"/>
-            <a:ext cx="2743200" cy="1737360"/>
-          </a:xfrm>
-          <a:prstGeom prst="rect">
-            <a:avLst/>
-          </a:prstGeom>
-          <a:solidFill>
-            <a:srgbClr val="1A2744"/>
-          </a:solidFill>
-          <a:ln w="12700">
-            <a:solidFill>
-              <a:srgbClr val="4ECDC4"/>
-            </a:solidFill>
-            <a:prstDash val="solid"/>
-          </a:ln>
-          <a:effectLst>
-            <a:outerShdw blurRad="76200" dist="25400" dir="8100000" algn="bl" rotWithShape="0">
-              <a:srgbClr val="000000">
-                <a:alpha val="25000"/>
-              </a:srgbClr>
-            </a:outerShdw>
-          </a:effectLst>
-        </p:spPr>
-        <p:txBody>
-          <a:bodyPr/>
-          <a:lstStyle/>
-          <a:p>
-            <a:endParaRPr lang="en-GB"/>
-          </a:p>
-        </p:txBody>
-      </p:sp>
-      <p:sp>
-        <p:nvSpPr>
-          <p:cNvPr id="18" name="Shape 16">
+          <p:cNvPicPr>
+            <a:picLocks noChangeAspect="1" noChangeArrowheads="1"/>
+          </p:cNvPicPr>
+          <p:nvPr/>
+        </p:nvPicPr>
+        <p:blipFill>
+          <a:blip r:embed="rId4">
             <a:extLst>
-              <a:ext uri="{FF2B5EF4-FFF2-40B4-BE49-F238E27FC236}">
-                <a16:creationId xmlns:a16="http://schemas.microsoft.com/office/drawing/2014/main" id="{9263A104-E77C-A009-425B-04CAFA10E259}"/>
+              <a:ext uri="{28A0092B-C50C-407E-A947-70E740481C1C}">
+                <a14:useLocalDpi xmlns:a14="http://schemas.microsoft.com/office/drawing/2010/main" val="0"/>
               </a:ext>
             </a:extLst>
-          </p:cNvPr>
-          <p:cNvSpPr/>
-          <p:nvPr/>
-        </p:nvSpPr>
-        <p:spPr>
-          <a:xfrm>
-            <a:off x="228600" y="2834640"/>
-            <a:ext cx="82296" cy="1737360"/>
-          </a:xfrm>
-          <a:prstGeom prst="rect">
-            <a:avLst/>
-          </a:prstGeom>
-          <a:solidFill>
-            <a:srgbClr val="2ECC71"/>
-          </a:solidFill>
-          <a:ln w="12700">
-            <a:solidFill>
-              <a:srgbClr val="2ECC71"/>
-            </a:solidFill>
-            <a:prstDash val="solid"/>
-          </a:ln>
-        </p:spPr>
-        <p:txBody>
-          <a:bodyPr/>
-          <a:lstStyle/>
-          <a:p>
-            <a:endParaRPr lang="en-GB"/>
-          </a:p>
-        </p:txBody>
-      </p:sp>
-      <p:sp>
-        <p:nvSpPr>
-          <p:cNvPr id="19" name="Text 17">
-            <a:extLst>
-              <a:ext uri="{FF2B5EF4-FFF2-40B4-BE49-F238E27FC236}">
-                <a16:creationId xmlns:a16="http://schemas.microsoft.com/office/drawing/2014/main" id="{D228D86D-2394-3EF4-36A3-F8CB889A7DB0}"/>
-              </a:ext>
-            </a:extLst>
-          </p:cNvPr>
-          <p:cNvSpPr/>
-          <p:nvPr/>
-        </p:nvSpPr>
-        <p:spPr>
-          <a:xfrm>
-            <a:off x="365760" y="2907792"/>
-            <a:ext cx="2514600" cy="411480"/>
-          </a:xfrm>
-          <a:prstGeom prst="rect">
-            <a:avLst/>
-          </a:prstGeom>
-          <a:noFill/>
-          <a:ln/>
-        </p:spPr>
-        <p:txBody>
-          <a:bodyPr wrap="square" lIns="0" tIns="0" rIns="0" bIns="0" rtlCol="0" anchor="ctr"/>
-          <a:lstStyle/>
-          <a:p>
-            <a:pPr marL="0" indent="0">
-              <a:buNone/>
-            </a:pPr>
-            <a:r>
-              <a:rPr lang="en-US" sz="1300" b="1" dirty="0">
-                <a:solidFill>
-                  <a:schemeClr val="bg1"/>
-                </a:solidFill>
-                <a:latin typeface="Calibri" pitchFamily="34" charset="0"/>
-                <a:ea typeface="Calibri" pitchFamily="34" charset="-122"/>
-                <a:cs typeface="Calibri" pitchFamily="34" charset="-120"/>
-              </a:rPr>
-              <a:t>POI System</a:t>
-            </a:r>
-            <a:endParaRPr lang="en-US" sz="1300" dirty="0">
-              <a:solidFill>
-                <a:schemeClr val="bg1"/>
-              </a:solidFill>
-            </a:endParaRPr>
-          </a:p>
-        </p:txBody>
-      </p:sp>
-      <p:sp>
-        <p:nvSpPr>
-          <p:cNvPr id="20" name="Text 18">
-            <a:extLst>
-              <a:ext uri="{FF2B5EF4-FFF2-40B4-BE49-F238E27FC236}">
-                <a16:creationId xmlns:a16="http://schemas.microsoft.com/office/drawing/2014/main" id="{9E083553-61D5-8B74-FA3A-241984B5DFAE}"/>
-              </a:ext>
-            </a:extLst>
-          </p:cNvPr>
-          <p:cNvSpPr/>
-          <p:nvPr/>
-        </p:nvSpPr>
-        <p:spPr>
-          <a:xfrm>
-            <a:off x="365760" y="3337560"/>
-            <a:ext cx="2514600" cy="1143000"/>
-          </a:xfrm>
-          <a:prstGeom prst="rect">
-            <a:avLst/>
-          </a:prstGeom>
-          <a:noFill/>
-          <a:ln/>
-        </p:spPr>
-        <p:txBody>
-          <a:bodyPr wrap="square" lIns="0" tIns="0" rIns="0" bIns="0" rtlCol="0" anchor="ctr"/>
-          <a:lstStyle/>
-          <a:p>
-            <a:pPr marL="0" indent="0">
-              <a:buNone/>
-            </a:pPr>
-            <a:r>
-              <a:rPr lang="en-US" sz="1050" dirty="0">
-                <a:solidFill>
-                  <a:schemeClr val="bg1"/>
-                </a:solidFill>
-                <a:latin typeface="Calibri" pitchFamily="34" charset="0"/>
-                <a:ea typeface="Calibri" pitchFamily="34" charset="-122"/>
-                <a:cs typeface="Calibri" pitchFamily="34" charset="-120"/>
-              </a:rPr>
-              <a:t>Farms placed at Voronoi sites, TMX collision templates</a:t>
-            </a:r>
-            <a:endParaRPr lang="en-US" sz="1050" dirty="0">
-              <a:solidFill>
-                <a:schemeClr val="bg1"/>
-              </a:solidFill>
-            </a:endParaRPr>
-          </a:p>
-        </p:txBody>
-      </p:sp>
-      <p:sp>
-        <p:nvSpPr>
-          <p:cNvPr id="21" name="Shape 19">
-            <a:extLst>
-              <a:ext uri="{FF2B5EF4-FFF2-40B4-BE49-F238E27FC236}">
-                <a16:creationId xmlns:a16="http://schemas.microsoft.com/office/drawing/2014/main" id="{90CD7CEA-31D8-72FE-3BD7-E3BE6714F113}"/>
-              </a:ext>
-            </a:extLst>
-          </p:cNvPr>
-          <p:cNvSpPr/>
-          <p:nvPr/>
-        </p:nvSpPr>
-        <p:spPr>
-          <a:xfrm>
-            <a:off x="3200400" y="2834640"/>
-            <a:ext cx="2743200" cy="1737360"/>
-          </a:xfrm>
-          <a:prstGeom prst="rect">
-            <a:avLst/>
-          </a:prstGeom>
-          <a:solidFill>
-            <a:srgbClr val="1A2744"/>
-          </a:solidFill>
-          <a:ln w="12700">
-            <a:solidFill>
-              <a:srgbClr val="4ECDC4"/>
-            </a:solidFill>
-            <a:prstDash val="solid"/>
-          </a:ln>
-          <a:effectLst>
-            <a:outerShdw blurRad="76200" dist="25400" dir="8100000" algn="bl" rotWithShape="0">
-              <a:srgbClr val="000000">
-                <a:alpha val="25000"/>
-              </a:srgbClr>
-            </a:outerShdw>
-          </a:effectLst>
-        </p:spPr>
-        <p:txBody>
-          <a:bodyPr/>
-          <a:lstStyle/>
-          <a:p>
-            <a:endParaRPr lang="en-GB"/>
-          </a:p>
-        </p:txBody>
-      </p:sp>
-      <p:sp>
-        <p:nvSpPr>
-          <p:cNvPr id="22" name="Shape 20">
-            <a:extLst>
-              <a:ext uri="{FF2B5EF4-FFF2-40B4-BE49-F238E27FC236}">
-                <a16:creationId xmlns:a16="http://schemas.microsoft.com/office/drawing/2014/main" id="{0F7938A1-B4FA-186E-3887-D50250420C82}"/>
-              </a:ext>
-            </a:extLst>
-          </p:cNvPr>
-          <p:cNvSpPr/>
-          <p:nvPr/>
-        </p:nvSpPr>
-        <p:spPr>
-          <a:xfrm>
-            <a:off x="3200400" y="2834640"/>
-            <a:ext cx="82296" cy="1737360"/>
-          </a:xfrm>
-          <a:prstGeom prst="rect">
-            <a:avLst/>
-          </a:prstGeom>
-          <a:solidFill>
-            <a:srgbClr val="2ECC71"/>
-          </a:solidFill>
-          <a:ln w="12700">
-            <a:solidFill>
-              <a:srgbClr val="2ECC71"/>
-            </a:solidFill>
-            <a:prstDash val="solid"/>
-          </a:ln>
-        </p:spPr>
-        <p:txBody>
-          <a:bodyPr/>
-          <a:lstStyle/>
-          <a:p>
-            <a:endParaRPr lang="en-GB"/>
-          </a:p>
-        </p:txBody>
-      </p:sp>
-      <p:sp>
-        <p:nvSpPr>
-          <p:cNvPr id="23" name="Text 21">
-            <a:extLst>
-              <a:ext uri="{FF2B5EF4-FFF2-40B4-BE49-F238E27FC236}">
-                <a16:creationId xmlns:a16="http://schemas.microsoft.com/office/drawing/2014/main" id="{60B8B622-1F35-BF3C-32A1-E51EBB78E294}"/>
-              </a:ext>
-            </a:extLst>
-          </p:cNvPr>
-          <p:cNvSpPr/>
-          <p:nvPr/>
-        </p:nvSpPr>
-        <p:spPr>
-          <a:xfrm>
-            <a:off x="3337560" y="2907792"/>
-            <a:ext cx="2514600" cy="411480"/>
-          </a:xfrm>
-          <a:prstGeom prst="rect">
-            <a:avLst/>
-          </a:prstGeom>
-          <a:noFill/>
-          <a:ln/>
-        </p:spPr>
-        <p:txBody>
-          <a:bodyPr wrap="square" lIns="0" tIns="0" rIns="0" bIns="0" rtlCol="0" anchor="ctr"/>
-          <a:lstStyle/>
-          <a:p>
-            <a:pPr marL="0" indent="0">
-              <a:buNone/>
-            </a:pPr>
-            <a:r>
-              <a:rPr lang="en-US" sz="1300" b="1" dirty="0">
-                <a:solidFill>
-                  <a:srgbClr val="EAEAEA"/>
-                </a:solidFill>
-                <a:latin typeface="Calibri" pitchFamily="34" charset="0"/>
-                <a:ea typeface="Calibri" pitchFamily="34" charset="-122"/>
-                <a:cs typeface="Calibri" pitchFamily="34" charset="-120"/>
-              </a:rPr>
-              <a:t>Player &amp; Camera</a:t>
-            </a:r>
-            <a:endParaRPr lang="en-US" sz="1300" dirty="0"/>
-          </a:p>
-        </p:txBody>
-      </p:sp>
-      <p:sp>
-        <p:nvSpPr>
-          <p:cNvPr id="24" name="Text 22">
-            <a:extLst>
-              <a:ext uri="{FF2B5EF4-FFF2-40B4-BE49-F238E27FC236}">
-                <a16:creationId xmlns:a16="http://schemas.microsoft.com/office/drawing/2014/main" id="{220D4469-6059-EA27-04D1-7E5ED819B2E7}"/>
-              </a:ext>
-            </a:extLst>
-          </p:cNvPr>
-          <p:cNvSpPr/>
-          <p:nvPr/>
-        </p:nvSpPr>
-        <p:spPr>
-          <a:xfrm>
-            <a:off x="3337560" y="3337560"/>
-            <a:ext cx="2514600" cy="1143000"/>
-          </a:xfrm>
-          <a:prstGeom prst="rect">
-            <a:avLst/>
-          </a:prstGeom>
-          <a:noFill/>
-          <a:ln/>
-        </p:spPr>
-        <p:txBody>
-          <a:bodyPr wrap="square" lIns="0" tIns="0" rIns="0" bIns="0" rtlCol="0" anchor="ctr"/>
-          <a:lstStyle/>
-          <a:p>
-            <a:pPr marL="0" indent="0">
-              <a:buNone/>
-            </a:pPr>
-            <a:r>
-              <a:rPr lang="en-US" sz="1050" dirty="0">
-                <a:solidFill>
-                  <a:schemeClr val="bg1"/>
-                </a:solidFill>
-                <a:latin typeface="Calibri" pitchFamily="34" charset="0"/>
-                <a:ea typeface="Calibri" pitchFamily="34" charset="-122"/>
-                <a:cs typeface="Calibri" pitchFamily="34" charset="-120"/>
-              </a:rPr>
-              <a:t>State machine (Idle/Walk/Sprint/Inventory), mouse-facing rotation, camera clamp</a:t>
-            </a:r>
-            <a:endParaRPr lang="en-US" sz="1050" dirty="0">
-              <a:solidFill>
-                <a:schemeClr val="bg1"/>
-              </a:solidFill>
-            </a:endParaRPr>
-          </a:p>
-        </p:txBody>
-      </p:sp>
-      <p:sp>
-        <p:nvSpPr>
-          <p:cNvPr id="25" name="Shape 23">
-            <a:extLst>
-              <a:ext uri="{FF2B5EF4-FFF2-40B4-BE49-F238E27FC236}">
-                <a16:creationId xmlns:a16="http://schemas.microsoft.com/office/drawing/2014/main" id="{9A755A95-5208-7C9C-7564-ED53A7E83708}"/>
-              </a:ext>
-            </a:extLst>
-          </p:cNvPr>
-          <p:cNvSpPr/>
-          <p:nvPr/>
-        </p:nvSpPr>
-        <p:spPr>
-          <a:xfrm>
-            <a:off x="6172200" y="2834640"/>
-            <a:ext cx="2743200" cy="1737360"/>
-          </a:xfrm>
-          <a:prstGeom prst="rect">
-            <a:avLst/>
-          </a:prstGeom>
-          <a:solidFill>
-            <a:srgbClr val="1A2744"/>
-          </a:solidFill>
-          <a:ln w="12700">
-            <a:solidFill>
-              <a:srgbClr val="4ECDC4"/>
-            </a:solidFill>
-            <a:prstDash val="solid"/>
-          </a:ln>
-          <a:effectLst>
-            <a:outerShdw blurRad="76200" dist="25400" dir="8100000" algn="bl" rotWithShape="0">
-              <a:srgbClr val="000000">
-                <a:alpha val="25000"/>
-              </a:srgbClr>
-            </a:outerShdw>
-          </a:effectLst>
-        </p:spPr>
-        <p:txBody>
-          <a:bodyPr/>
-          <a:lstStyle/>
-          <a:p>
-            <a:endParaRPr lang="en-GB"/>
-          </a:p>
-        </p:txBody>
-      </p:sp>
-      <p:sp>
-        <p:nvSpPr>
-          <p:cNvPr id="26" name="Shape 24">
-            <a:extLst>
-              <a:ext uri="{FF2B5EF4-FFF2-40B4-BE49-F238E27FC236}">
-                <a16:creationId xmlns:a16="http://schemas.microsoft.com/office/drawing/2014/main" id="{E4CC1B9F-8B66-CAED-18EA-5A6837536F16}"/>
-              </a:ext>
-            </a:extLst>
-          </p:cNvPr>
-          <p:cNvSpPr/>
-          <p:nvPr/>
-        </p:nvSpPr>
-        <p:spPr>
-          <a:xfrm>
-            <a:off x="6172200" y="2834640"/>
-            <a:ext cx="82296" cy="1737360"/>
-          </a:xfrm>
-          <a:prstGeom prst="rect">
-            <a:avLst/>
-          </a:prstGeom>
-          <a:solidFill>
-            <a:srgbClr val="2ECC71"/>
-          </a:solidFill>
-          <a:ln w="12700">
-            <a:solidFill>
-              <a:srgbClr val="2ECC71"/>
-            </a:solidFill>
-            <a:prstDash val="solid"/>
-          </a:ln>
-        </p:spPr>
-        <p:txBody>
-          <a:bodyPr/>
-          <a:lstStyle/>
-          <a:p>
-            <a:endParaRPr lang="en-GB"/>
-          </a:p>
-        </p:txBody>
-      </p:sp>
-      <p:sp>
-        <p:nvSpPr>
-          <p:cNvPr id="27" name="Text 25">
-            <a:extLst>
-              <a:ext uri="{FF2B5EF4-FFF2-40B4-BE49-F238E27FC236}">
-                <a16:creationId xmlns:a16="http://schemas.microsoft.com/office/drawing/2014/main" id="{38C5EED6-33F1-9239-489E-27FE30E2AEBA}"/>
-              </a:ext>
-            </a:extLst>
-          </p:cNvPr>
-          <p:cNvSpPr/>
-          <p:nvPr/>
-        </p:nvSpPr>
-        <p:spPr>
-          <a:xfrm>
-            <a:off x="6309360" y="2907792"/>
-            <a:ext cx="2514600" cy="411480"/>
-          </a:xfrm>
-          <a:prstGeom prst="rect">
-            <a:avLst/>
-          </a:prstGeom>
-          <a:noFill/>
-          <a:ln/>
-        </p:spPr>
-        <p:txBody>
-          <a:bodyPr wrap="square" lIns="0" tIns="0" rIns="0" bIns="0" rtlCol="0" anchor="ctr"/>
-          <a:lstStyle/>
-          <a:p>
-            <a:pPr marL="0" indent="0">
-              <a:buNone/>
-            </a:pPr>
-            <a:r>
-              <a:rPr lang="en-US" sz="1300" b="1" dirty="0">
-                <a:solidFill>
-                  <a:srgbClr val="EAEAEA"/>
-                </a:solidFill>
-                <a:latin typeface="Calibri" pitchFamily="34" charset="0"/>
-                <a:ea typeface="Calibri" pitchFamily="34" charset="-122"/>
-                <a:cs typeface="Calibri" pitchFamily="34" charset="-120"/>
-              </a:rPr>
-              <a:t>UI Framework</a:t>
-            </a:r>
-            <a:endParaRPr lang="en-US" sz="1300" dirty="0"/>
-          </a:p>
-        </p:txBody>
-      </p:sp>
-      <p:sp>
-        <p:nvSpPr>
-          <p:cNvPr id="28" name="Text 26">
-            <a:extLst>
-              <a:ext uri="{FF2B5EF4-FFF2-40B4-BE49-F238E27FC236}">
-                <a16:creationId xmlns:a16="http://schemas.microsoft.com/office/drawing/2014/main" id="{008325B3-2AE5-0186-BB98-35A19BA2C0E8}"/>
-              </a:ext>
-            </a:extLst>
-          </p:cNvPr>
-          <p:cNvSpPr/>
-          <p:nvPr/>
-        </p:nvSpPr>
-        <p:spPr>
-          <a:xfrm>
-            <a:off x="6309360" y="3337560"/>
-            <a:ext cx="2514600" cy="1143000"/>
-          </a:xfrm>
-          <a:prstGeom prst="rect">
-            <a:avLst/>
-          </a:prstGeom>
-          <a:noFill/>
-          <a:ln/>
-        </p:spPr>
-        <p:txBody>
-          <a:bodyPr wrap="square" lIns="0" tIns="0" rIns="0" bIns="0" rtlCol="0" anchor="ctr"/>
-          <a:lstStyle/>
-          <a:p>
-            <a:pPr marL="0" indent="0">
-              <a:buNone/>
-            </a:pPr>
-            <a:r>
-              <a:rPr lang="en-US" sz="1050" dirty="0">
-                <a:solidFill>
-                  <a:schemeClr val="bg1"/>
-                </a:solidFill>
-                <a:latin typeface="Calibri" pitchFamily="34" charset="0"/>
-                <a:ea typeface="Calibri" pitchFamily="34" charset="-122"/>
-                <a:cs typeface="Calibri" pitchFamily="34" charset="-120"/>
-              </a:rPr>
-              <a:t>Main, Pause &amp; Settings menus with key rebinding, inventory grid (10 slots), HUD bars</a:t>
-            </a:r>
-            <a:endParaRPr lang="en-US" sz="1050" dirty="0">
-              <a:solidFill>
-                <a:schemeClr val="bg1"/>
-              </a:solidFill>
-            </a:endParaRPr>
-          </a:p>
-        </p:txBody>
-      </p:sp>
-      <p:sp>
-        <p:nvSpPr>
-          <p:cNvPr id="29" name="Text 27">
-            <a:extLst>
-              <a:ext uri="{FF2B5EF4-FFF2-40B4-BE49-F238E27FC236}">
-                <a16:creationId xmlns:a16="http://schemas.microsoft.com/office/drawing/2014/main" id="{06A1D6AC-D69E-B07B-4F3D-62A81C12130E}"/>
-              </a:ext>
-            </a:extLst>
-          </p:cNvPr>
-          <p:cNvSpPr/>
-          <p:nvPr/>
-        </p:nvSpPr>
-        <p:spPr>
-          <a:xfrm>
-            <a:off x="0" y="4754880"/>
-            <a:ext cx="9144000" cy="365760"/>
-          </a:xfrm>
-          <a:prstGeom prst="rect">
-            <a:avLst/>
-          </a:prstGeom>
-          <a:noFill/>
-          <a:ln/>
-        </p:spPr>
-        <p:txBody>
-          <a:bodyPr wrap="square" lIns="0" tIns="0" rIns="0" bIns="0" rtlCol="0" anchor="ctr"/>
-          <a:lstStyle/>
-          <a:p>
-            <a:pPr marL="0" indent="0" algn="ctr">
-              <a:buNone/>
-            </a:pPr>
-            <a:endParaRPr lang="en-US" sz="1200" dirty="0"/>
-          </a:p>
-        </p:txBody>
-      </p:sp>
+          </a:blip>
+          <a:srcRect/>
+          <a:stretch>
+            <a:fillRect/>
+          </a:stretch>
+        </p:blipFill>
+        <p:spPr bwMode="auto">
+          <a:xfrm>
+            <a:off x="1021191" y="1135034"/>
+            <a:ext cx="3221759" cy="2229990"/>
+          </a:xfrm>
+          <a:prstGeom prst="rect">
+            <a:avLst/>
+          </a:prstGeom>
+          <a:noFill/>
+          <a:extLst>
+            <a:ext uri="{909E8E84-426E-40DD-AFC4-6F175D3DCCD1}">
+              <a14:hiddenFill xmlns:a14="http://schemas.microsoft.com/office/drawing/2010/main">
+                <a:solidFill>
+                  <a:srgbClr val="FFFFFF"/>
+                </a:solidFill>
+              </a14:hiddenFill>
+            </a:ext>
+          </a:extLst>
+        </p:spPr>
+      </p:pic>
     </p:spTree>
     <p:extLst>
       <p:ext uri="{BB962C8B-B14F-4D97-AF65-F5344CB8AC3E}">
@@ -5851,7 +5287,7 @@
                 <a:ea typeface="Calibri" pitchFamily="34" charset="-122"/>
                 <a:cs typeface="Calibri" pitchFamily="34" charset="-120"/>
               </a:rPr>
-              <a:t>Fixed 60 FPS timestep, push/pop state transitions (Menu, Playing, Paused, Settings)</a:t>
+              <a:t>Fixed 60 frame per second, push/pop state transitions (Menu, Playing, Paused, Settings)</a:t>
             </a:r>
             <a:endParaRPr lang="en-US" sz="1050" dirty="0">
               <a:solidFill>
@@ -8904,7 +8340,7 @@
         </p:nvSpPr>
         <p:spPr>
           <a:xfrm>
-            <a:off x="228600" y="3017520"/>
+            <a:off x="228600" y="2926080"/>
             <a:ext cx="4297680" cy="868680"/>
           </a:xfrm>
           <a:prstGeom prst="rect">
@@ -8943,7 +8379,7 @@
         </p:nvSpPr>
         <p:spPr>
           <a:xfrm>
-            <a:off x="228600" y="3017520"/>
+            <a:off x="228600" y="2926080"/>
             <a:ext cx="73152" cy="868680"/>
           </a:xfrm>
           <a:prstGeom prst="rect">
@@ -8975,7 +8411,7 @@
         </p:nvSpPr>
         <p:spPr>
           <a:xfrm>
-            <a:off x="365760" y="3063240"/>
+            <a:off x="365760" y="2971800"/>
             <a:ext cx="4069080" cy="274320"/>
           </a:xfrm>
           <a:prstGeom prst="rect">
@@ -9018,7 +8454,7 @@
         </p:nvSpPr>
         <p:spPr>
           <a:xfrm>
-            <a:off x="365760" y="3337560"/>
+            <a:off x="365760" y="3246120"/>
             <a:ext cx="4069080" cy="502920"/>
           </a:xfrm>
           <a:prstGeom prst="rect">
@@ -9105,6 +8541,184 @@
           </a:prstGeom>
         </p:spPr>
       </p:pic>
+      <p:sp>
+        <p:nvSpPr>
+          <p:cNvPr id="5" name="Shape 17">
+            <a:extLst>
+              <a:ext uri="{FF2B5EF4-FFF2-40B4-BE49-F238E27FC236}">
+                <a16:creationId xmlns:a16="http://schemas.microsoft.com/office/drawing/2014/main" id="{345B4363-9445-787B-4217-D39A54EDC020}"/>
+              </a:ext>
+            </a:extLst>
+          </p:cNvPr>
+          <p:cNvSpPr/>
+          <p:nvPr/>
+        </p:nvSpPr>
+        <p:spPr>
+          <a:xfrm>
+            <a:off x="228600" y="3931920"/>
+            <a:ext cx="4297680" cy="868680"/>
+          </a:xfrm>
+          <a:prstGeom prst="rect">
+            <a:avLst/>
+          </a:prstGeom>
+          <a:solidFill>
+            <a:srgbClr val="1A2744"/>
+          </a:solidFill>
+          <a:ln w="9525">
+            <a:solidFill>
+              <a:srgbClr val="4ECDC4"/>
+            </a:solidFill>
+            <a:prstDash val="solid"/>
+          </a:ln>
+          <a:effectLst>
+            <a:outerShdw blurRad="63500" dist="25400" dir="8100000" algn="bl" rotWithShape="0">
+              <a:srgbClr val="000000">
+                <a:alpha val="20000"/>
+              </a:srgbClr>
+            </a:outerShdw>
+          </a:effectLst>
+        </p:spPr>
+        <p:txBody>
+          <a:bodyPr/>
+          <a:lstStyle/>
+          <a:p>
+            <a:endParaRPr lang="en-GB"/>
+          </a:p>
+        </p:txBody>
+      </p:sp>
+      <p:sp>
+        <p:nvSpPr>
+          <p:cNvPr id="6" name="Shape 18">
+            <a:extLst>
+              <a:ext uri="{FF2B5EF4-FFF2-40B4-BE49-F238E27FC236}">
+                <a16:creationId xmlns:a16="http://schemas.microsoft.com/office/drawing/2014/main" id="{ECF703B0-1807-0CF0-C98F-6780083FB02F}"/>
+              </a:ext>
+            </a:extLst>
+          </p:cNvPr>
+          <p:cNvSpPr/>
+          <p:nvPr/>
+        </p:nvSpPr>
+        <p:spPr>
+          <a:xfrm>
+            <a:off x="228600" y="3931920"/>
+            <a:ext cx="73152" cy="868680"/>
+          </a:xfrm>
+          <a:prstGeom prst="rect">
+            <a:avLst/>
+          </a:prstGeom>
+          <a:solidFill>
+            <a:srgbClr val="4ECDC4"/>
+          </a:solidFill>
+          <a:ln w="12700">
+            <a:solidFill>
+              <a:srgbClr val="4ECDC4"/>
+            </a:solidFill>
+            <a:prstDash val="solid"/>
+          </a:ln>
+        </p:spPr>
+        <p:txBody>
+          <a:bodyPr/>
+          <a:lstStyle/>
+          <a:p>
+            <a:endParaRPr lang="en-GB"/>
+          </a:p>
+        </p:txBody>
+      </p:sp>
+      <p:sp>
+        <p:nvSpPr>
+          <p:cNvPr id="16" name="Text 19">
+            <a:extLst>
+              <a:ext uri="{FF2B5EF4-FFF2-40B4-BE49-F238E27FC236}">
+                <a16:creationId xmlns:a16="http://schemas.microsoft.com/office/drawing/2014/main" id="{76729060-D555-7671-E159-B1DF5C6CF043}"/>
+              </a:ext>
+            </a:extLst>
+          </p:cNvPr>
+          <p:cNvSpPr/>
+          <p:nvPr/>
+        </p:nvSpPr>
+        <p:spPr>
+          <a:xfrm>
+            <a:off x="365760" y="3977640"/>
+            <a:ext cx="4069080" cy="274320"/>
+          </a:xfrm>
+          <a:prstGeom prst="rect">
+            <a:avLst/>
+          </a:prstGeom>
+          <a:noFill/>
+          <a:ln/>
+        </p:spPr>
+        <p:txBody>
+          <a:bodyPr wrap="square" lIns="0" tIns="0" rIns="0" bIns="0" rtlCol="0" anchor="ctr"/>
+          <a:lstStyle/>
+          <a:p>
+            <a:r>
+              <a:rPr lang="en-US" sz="1200" b="1" dirty="0">
+                <a:solidFill>
+                  <a:schemeClr val="bg1"/>
+                </a:solidFill>
+                <a:latin typeface="Calibri" pitchFamily="34" charset="0"/>
+                <a:ea typeface="Calibri" pitchFamily="34" charset="-122"/>
+                <a:cs typeface="Calibri" pitchFamily="34" charset="-120"/>
+              </a:rPr>
+              <a:t>Reproducible</a:t>
+            </a:r>
+            <a:endParaRPr lang="en-US" sz="1200" dirty="0">
+              <a:solidFill>
+                <a:schemeClr val="bg1"/>
+              </a:solidFill>
+            </a:endParaRPr>
+          </a:p>
+        </p:txBody>
+      </p:sp>
+      <p:sp>
+        <p:nvSpPr>
+          <p:cNvPr id="17" name="Text 20">
+            <a:extLst>
+              <a:ext uri="{FF2B5EF4-FFF2-40B4-BE49-F238E27FC236}">
+                <a16:creationId xmlns:a16="http://schemas.microsoft.com/office/drawing/2014/main" id="{A21723FF-6771-558A-35EC-76BAA08F9966}"/>
+              </a:ext>
+            </a:extLst>
+          </p:cNvPr>
+          <p:cNvSpPr/>
+          <p:nvPr/>
+        </p:nvSpPr>
+        <p:spPr>
+          <a:xfrm>
+            <a:off x="365760" y="4251960"/>
+            <a:ext cx="4069080" cy="502920"/>
+          </a:xfrm>
+          <a:prstGeom prst="rect">
+            <a:avLst/>
+          </a:prstGeom>
+          <a:noFill/>
+          <a:ln/>
+        </p:spPr>
+        <p:txBody>
+          <a:bodyPr wrap="square" lIns="0" tIns="0" rIns="0" bIns="0" rtlCol="0" anchor="ctr"/>
+          <a:lstStyle/>
+          <a:p>
+            <a:pPr marL="0" indent="0">
+              <a:buNone/>
+            </a:pPr>
+            <a:r>
+              <a:rPr lang="en-US" sz="1050" dirty="0">
+                <a:solidFill>
+                  <a:schemeClr val="bg1"/>
+                </a:solidFill>
+                <a:latin typeface="Calibri" pitchFamily="34" charset="0"/>
+                <a:ea typeface="Calibri" pitchFamily="34" charset="-122"/>
+                <a:cs typeface="Calibri" pitchFamily="34" charset="-120"/>
+              </a:rPr>
+              <a:t>Using Perlin allows for the map to have deterministic seed generation, so its reproducible but still adheres to random generation.</a:t>
+            </a:r>
+            <a:endParaRPr lang="en-US" sz="1050" dirty="0">
+              <a:solidFill>
+                <a:schemeClr val="bg1"/>
+              </a:solidFill>
+            </a:endParaRPr>
+          </a:p>
+        </p:txBody>
+      </p:sp>
     </p:spTree>
   </p:cSld>
   <p:clrMapOvr>
@@ -9224,7 +8838,7 @@
         </p:blipFill>
         <p:spPr>
           <a:xfrm>
-            <a:off x="228600" y="868680"/>
+            <a:off x="150223" y="662940"/>
             <a:ext cx="3657600" cy="2926080"/>
           </a:xfrm>
           <a:prstGeom prst="rect">
@@ -9247,7 +8861,7 @@
         </p:blipFill>
         <p:spPr>
           <a:xfrm>
-            <a:off x="4114800" y="868680"/>
+            <a:off x="4114800" y="662940"/>
             <a:ext cx="4800600" cy="2926080"/>
           </a:xfrm>
           <a:prstGeom prst="rect">
@@ -9263,7 +8877,7 @@
         </p:nvSpPr>
         <p:spPr>
           <a:xfrm>
-            <a:off x="228600" y="3840480"/>
+            <a:off x="104502" y="3566160"/>
             <a:ext cx="3657600" cy="274320"/>
           </a:xfrm>
           <a:prstGeom prst="rect">
@@ -9306,7 +8920,7 @@
         </p:nvSpPr>
         <p:spPr>
           <a:xfrm>
-            <a:off x="4114800" y="3840480"/>
+            <a:off x="4147457" y="3566160"/>
             <a:ext cx="4800600" cy="274320"/>
           </a:xfrm>
           <a:prstGeom prst="rect">
@@ -9349,8 +8963,8 @@
         </p:nvSpPr>
         <p:spPr>
           <a:xfrm>
-            <a:off x="228600" y="4160520"/>
-            <a:ext cx="2011680" cy="868680"/>
+            <a:off x="91438" y="3840480"/>
+            <a:ext cx="2168435" cy="1211580"/>
           </a:xfrm>
           <a:prstGeom prst="rect">
             <a:avLst/>
@@ -9388,8 +9002,8 @@
         </p:nvSpPr>
         <p:spPr>
           <a:xfrm>
-            <a:off x="301752" y="4206240"/>
-            <a:ext cx="1865376" cy="256032"/>
+            <a:off x="164590" y="3886199"/>
+            <a:ext cx="2010731" cy="357097"/>
           </a:xfrm>
           <a:prstGeom prst="rect">
             <a:avLst/>
@@ -9405,7 +9019,7 @@
               <a:buNone/>
             </a:pPr>
             <a:r>
-              <a:rPr lang="en-US" sz="1000" b="1" dirty="0">
+              <a:rPr lang="en-US" sz="1400" b="1" dirty="0">
                 <a:solidFill>
                   <a:srgbClr val="4ECDC4"/>
                 </a:solidFill>
@@ -9415,7 +9029,7 @@
               </a:rPr>
               <a:t>Tiled Map Editor</a:t>
             </a:r>
-            <a:endParaRPr lang="en-US" sz="1000" dirty="0">
+            <a:endParaRPr lang="en-US" sz="1400" dirty="0">
               <a:solidFill>
                 <a:srgbClr val="4ECDC4"/>
               </a:solidFill>
@@ -9431,8 +9045,8 @@
         </p:nvSpPr>
         <p:spPr>
           <a:xfrm>
-            <a:off x="301752" y="4462272"/>
-            <a:ext cx="1865376" cy="521208"/>
+            <a:off x="164590" y="4142232"/>
+            <a:ext cx="2010731" cy="726948"/>
           </a:xfrm>
           <a:prstGeom prst="rect">
             <a:avLst/>
@@ -9448,7 +9062,7 @@
               <a:buNone/>
             </a:pPr>
             <a:r>
-              <a:rPr lang="en-US" sz="950" dirty="0">
+              <a:rPr lang="en-US" sz="1200" dirty="0">
                 <a:solidFill>
                   <a:schemeClr val="bg1"/>
                 </a:solidFill>
@@ -9456,9 +9070,9 @@
                 <a:ea typeface="Calibri" pitchFamily="34" charset="-122"/>
                 <a:cs typeface="Calibri" pitchFamily="34" charset="-120"/>
               </a:rPr>
-              <a:t>TMX files define named collision shapes for each POI and world object</a:t>
-            </a:r>
-            <a:endParaRPr lang="en-US" sz="950" dirty="0">
+              <a:t>TMX files define named collision shapes for each POI and world object.</a:t>
+            </a:r>
+            <a:endParaRPr lang="en-US" sz="1200" dirty="0">
               <a:solidFill>
                 <a:schemeClr val="bg1"/>
               </a:solidFill>
@@ -9474,8 +9088,8 @@
         </p:nvSpPr>
         <p:spPr>
           <a:xfrm>
-            <a:off x="2468880" y="4160520"/>
-            <a:ext cx="2011680" cy="868680"/>
+            <a:off x="2331718" y="3840480"/>
+            <a:ext cx="2168435" cy="1211580"/>
           </a:xfrm>
           <a:prstGeom prst="rect">
             <a:avLst/>
@@ -9513,8 +9127,8 @@
         </p:nvSpPr>
         <p:spPr>
           <a:xfrm>
-            <a:off x="2542032" y="4206240"/>
-            <a:ext cx="1865376" cy="256032"/>
+            <a:off x="2404870" y="3886199"/>
+            <a:ext cx="2010731" cy="357097"/>
           </a:xfrm>
           <a:prstGeom prst="rect">
             <a:avLst/>
@@ -9530,7 +9144,7 @@
               <a:buNone/>
             </a:pPr>
             <a:r>
-              <a:rPr lang="en-US" sz="1000" b="1" dirty="0">
+              <a:rPr lang="en-US" sz="1400" b="1" dirty="0">
                 <a:solidFill>
                   <a:srgbClr val="4ECDC4"/>
                 </a:solidFill>
@@ -9540,7 +9154,7 @@
               </a:rPr>
               <a:t>tmxlite Library</a:t>
             </a:r>
-            <a:endParaRPr lang="en-US" sz="1000" dirty="0">
+            <a:endParaRPr lang="en-US" sz="1400" dirty="0">
               <a:solidFill>
                 <a:srgbClr val="4ECDC4"/>
               </a:solidFill>
@@ -9556,8 +9170,8 @@
         </p:nvSpPr>
         <p:spPr>
           <a:xfrm>
-            <a:off x="2542032" y="4462272"/>
-            <a:ext cx="1865376" cy="521208"/>
+            <a:off x="2404870" y="4142232"/>
+            <a:ext cx="2010731" cy="726948"/>
           </a:xfrm>
           <a:prstGeom prst="rect">
             <a:avLst/>
@@ -9573,7 +9187,7 @@
               <a:buNone/>
             </a:pPr>
             <a:r>
-              <a:rPr lang="en-US" sz="950" dirty="0">
+              <a:rPr lang="en-US" sz="1200" dirty="0">
                 <a:solidFill>
                   <a:schemeClr val="bg1"/>
                 </a:solidFill>
@@ -9581,9 +9195,9 @@
                 <a:ea typeface="Calibri" pitchFamily="34" charset="-122"/>
                 <a:cs typeface="Calibri" pitchFamily="34" charset="-120"/>
               </a:rPr>
-              <a:t>Parses .tmx XML at compile time, extracting polygons &amp; rectangles</a:t>
-            </a:r>
-            <a:endParaRPr lang="en-US" sz="950" dirty="0">
+              <a:t>Parses .tmx XML at compile time, extracting polygons &amp; rectangles.</a:t>
+            </a:r>
+            <a:endParaRPr lang="en-US" sz="1200" dirty="0">
               <a:solidFill>
                 <a:schemeClr val="bg1"/>
               </a:solidFill>
@@ -9599,8 +9213,8 @@
         </p:nvSpPr>
         <p:spPr>
           <a:xfrm>
-            <a:off x="4709160" y="4160520"/>
-            <a:ext cx="2011680" cy="868680"/>
+            <a:off x="4571998" y="3840480"/>
+            <a:ext cx="2168435" cy="1211580"/>
           </a:xfrm>
           <a:prstGeom prst="rect">
             <a:avLst/>
@@ -9638,8 +9252,8 @@
         </p:nvSpPr>
         <p:spPr>
           <a:xfrm>
-            <a:off x="4782312" y="4206240"/>
-            <a:ext cx="1865376" cy="256032"/>
+            <a:off x="4645150" y="3886199"/>
+            <a:ext cx="2010731" cy="357097"/>
           </a:xfrm>
           <a:prstGeom prst="rect">
             <a:avLst/>
@@ -9655,7 +9269,7 @@
               <a:buNone/>
             </a:pPr>
             <a:r>
-              <a:rPr lang="en-US" sz="1000" b="1" dirty="0">
+              <a:rPr lang="en-US" sz="1400" b="1" dirty="0">
                 <a:solidFill>
                   <a:srgbClr val="4ECDC4"/>
                 </a:solidFill>
@@ -9665,7 +9279,7 @@
               </a:rPr>
               <a:t>SAT Collision</a:t>
             </a:r>
-            <a:endParaRPr lang="en-US" sz="1000" dirty="0">
+            <a:endParaRPr lang="en-US" sz="1400" dirty="0">
               <a:solidFill>
                 <a:srgbClr val="4ECDC4"/>
               </a:solidFill>
@@ -9681,8 +9295,8 @@
         </p:nvSpPr>
         <p:spPr>
           <a:xfrm>
-            <a:off x="4782312" y="4462272"/>
-            <a:ext cx="1865376" cy="521208"/>
+            <a:off x="4645150" y="4142232"/>
+            <a:ext cx="2010731" cy="726948"/>
           </a:xfrm>
           <a:prstGeom prst="rect">
             <a:avLst/>
@@ -9698,7 +9312,7 @@
               <a:buNone/>
             </a:pPr>
             <a:r>
-              <a:rPr lang="en-US" sz="950" dirty="0">
+              <a:rPr lang="en-US" sz="1200" dirty="0">
                 <a:solidFill>
                   <a:schemeClr val="bg1"/>
                 </a:solidFill>
@@ -9706,20 +9320,9 @@
                 <a:ea typeface="Calibri" pitchFamily="34" charset="-122"/>
                 <a:cs typeface="Calibri" pitchFamily="34" charset="-120"/>
               </a:rPr>
-              <a:t>CollisionManager uses Separating Axis Theorem (SAT), just check overlapping </a:t>
-            </a:r>
-            <a:r>
-              <a:rPr lang="en-US" sz="950" dirty="0" err="1">
-                <a:solidFill>
-                  <a:schemeClr val="bg1"/>
-                </a:solidFill>
-                <a:latin typeface="Calibri" pitchFamily="34" charset="0"/>
-                <a:ea typeface="Calibri" pitchFamily="34" charset="-122"/>
-                <a:cs typeface="Calibri" pitchFamily="34" charset="-120"/>
-              </a:rPr>
-              <a:t>axises</a:t>
-            </a:r>
-            <a:endParaRPr lang="en-US" sz="950" dirty="0">
+              <a:t>CollisionManager uses Separating Axis Theorem (SAT). “Does this vector overlap this one?”.</a:t>
+            </a:r>
+            <a:endParaRPr lang="en-US" sz="1200" dirty="0">
               <a:solidFill>
                 <a:schemeClr val="bg1"/>
               </a:solidFill>
@@ -9735,8 +9338,8 @@
         </p:nvSpPr>
         <p:spPr>
           <a:xfrm>
-            <a:off x="6949440" y="4160520"/>
-            <a:ext cx="2011680" cy="868680"/>
+            <a:off x="6812278" y="3840480"/>
+            <a:ext cx="2168435" cy="1211580"/>
           </a:xfrm>
           <a:prstGeom prst="rect">
             <a:avLst/>
@@ -9774,8 +9377,8 @@
         </p:nvSpPr>
         <p:spPr>
           <a:xfrm>
-            <a:off x="7022592" y="4206240"/>
-            <a:ext cx="1865376" cy="256032"/>
+            <a:off x="6885430" y="3886199"/>
+            <a:ext cx="2010731" cy="357097"/>
           </a:xfrm>
           <a:prstGeom prst="rect">
             <a:avLst/>
@@ -9791,7 +9394,7 @@
               <a:buNone/>
             </a:pPr>
             <a:r>
-              <a:rPr lang="en-US" sz="1000" b="1" dirty="0">
+              <a:rPr lang="en-US" sz="1400" b="1" dirty="0">
                 <a:solidFill>
                   <a:srgbClr val="4ECDC4"/>
                 </a:solidFill>
@@ -9801,7 +9404,7 @@
               </a:rPr>
               <a:t>Flyweight Pattern</a:t>
             </a:r>
-            <a:endParaRPr lang="en-US" sz="1000" dirty="0">
+            <a:endParaRPr lang="en-US" sz="1400" dirty="0">
               <a:solidFill>
                 <a:srgbClr val="4ECDC4"/>
               </a:solidFill>
@@ -9817,8 +9420,8 @@
         </p:nvSpPr>
         <p:spPr>
           <a:xfrm>
-            <a:off x="7022592" y="4462272"/>
-            <a:ext cx="1865376" cy="521208"/>
+            <a:off x="6885430" y="4142232"/>
+            <a:ext cx="2010731" cy="726948"/>
           </a:xfrm>
           <a:prstGeom prst="rect">
             <a:avLst/>
@@ -9834,7 +9437,7 @@
               <a:buNone/>
             </a:pPr>
             <a:r>
-              <a:rPr lang="en-US" sz="950" dirty="0">
+              <a:rPr lang="en-US" sz="1200" dirty="0">
                 <a:solidFill>
                   <a:schemeClr val="bg1"/>
                 </a:solidFill>
@@ -9842,9 +9445,9 @@
                 <a:ea typeface="Calibri" pitchFamily="34" charset="-122"/>
                 <a:cs typeface="Calibri" pitchFamily="34" charset="-120"/>
               </a:rPr>
-              <a:t>Shared shape tables all tree stumps reference the same collision data</a:t>
-            </a:r>
-            <a:endParaRPr lang="en-US" sz="950" dirty="0">
+              <a:t>Multiple objects reference the same data table for collision, not given individual ones.</a:t>
+            </a:r>
+            <a:endParaRPr lang="en-US" sz="1200" dirty="0">
               <a:solidFill>
                 <a:schemeClr val="bg1"/>
               </a:solidFill>
@@ -10285,7 +9888,7 @@
                 <a:ea typeface="Calibri" pitchFamily="34" charset="-122"/>
                 <a:cs typeface="Calibri" pitchFamily="34" charset="-120"/>
               </a:rPr>
-              <a:t> (Map is X big and to use 5 sites, divide into 5 sections accordingly. </a:t>
+              <a:t> (Map is X big and to use 5 sites, divide into 5 sections accordingly.) </a:t>
             </a:r>
             <a:endParaRPr lang="en-US" sz="1050" dirty="0">
               <a:solidFill>
